--- a/震動天地(崇拜版).pptx
+++ b/震動天地(崇拜版).pptx
@@ -169,10 +169,9 @@
           <a:lstStyle/>
           <a:p>
             <a:r>
-              <a:rPr lang="zh-TW" altLang="en-US" smtClean="0"/>
+              <a:rPr lang="zh-TW" altLang="en-US"/>
               <a:t>按一下以編輯母片標題樣式</a:t>
             </a:r>
-            <a:endParaRPr lang="zh-TW" altLang="en-US"/>
           </a:p>
         </p:txBody>
       </p:sp>
@@ -288,10 +287,9 @@
           </a:lstStyle>
           <a:p>
             <a:r>
-              <a:rPr lang="zh-TW" altLang="en-US" smtClean="0"/>
+              <a:rPr lang="zh-TW" altLang="en-US"/>
               <a:t>按一下以編輯母片副標題樣式</a:t>
             </a:r>
-            <a:endParaRPr lang="zh-TW" altLang="en-US"/>
           </a:p>
         </p:txBody>
       </p:sp>
@@ -312,7 +310,7 @@
           <a:p>
             <a:fld id="{D4416F66-9758-4FBC-B24D-658CEEE1F2E2}" type="datetimeFigureOut">
               <a:rPr lang="zh-TW" altLang="en-US" smtClean="0"/>
-              <a:t>2023/11/11</a:t>
+              <a:t>2024/5/25</a:t>
             </a:fld>
             <a:endParaRPr lang="zh-TW" altLang="en-US"/>
           </a:p>
@@ -401,10 +399,9 @@
           <a:lstStyle/>
           <a:p>
             <a:r>
-              <a:rPr lang="zh-TW" altLang="en-US" smtClean="0"/>
+              <a:rPr lang="zh-TW" altLang="en-US"/>
               <a:t>按一下以編輯母片標題樣式</a:t>
             </a:r>
-            <a:endParaRPr lang="zh-TW" altLang="en-US"/>
           </a:p>
         </p:txBody>
       </p:sp>
@@ -425,38 +422,37 @@
           <a:p>
             <a:pPr lvl="0"/>
             <a:r>
-              <a:rPr lang="zh-TW" altLang="en-US" smtClean="0"/>
+              <a:rPr lang="zh-TW" altLang="en-US"/>
               <a:t>按一下以編輯母片文字樣式</a:t>
             </a:r>
           </a:p>
           <a:p>
             <a:pPr lvl="1"/>
             <a:r>
-              <a:rPr lang="zh-TW" altLang="en-US" smtClean="0"/>
+              <a:rPr lang="zh-TW" altLang="en-US"/>
               <a:t>第二層</a:t>
             </a:r>
           </a:p>
           <a:p>
             <a:pPr lvl="2"/>
             <a:r>
-              <a:rPr lang="zh-TW" altLang="en-US" smtClean="0"/>
+              <a:rPr lang="zh-TW" altLang="en-US"/>
               <a:t>第三層</a:t>
             </a:r>
           </a:p>
           <a:p>
             <a:pPr lvl="3"/>
             <a:r>
-              <a:rPr lang="zh-TW" altLang="en-US" smtClean="0"/>
+              <a:rPr lang="zh-TW" altLang="en-US"/>
               <a:t>第四層</a:t>
             </a:r>
           </a:p>
           <a:p>
             <a:pPr lvl="4"/>
             <a:r>
-              <a:rPr lang="zh-TW" altLang="en-US" smtClean="0"/>
+              <a:rPr lang="zh-TW" altLang="en-US"/>
               <a:t>第五層</a:t>
             </a:r>
-            <a:endParaRPr lang="zh-TW" altLang="en-US"/>
           </a:p>
         </p:txBody>
       </p:sp>
@@ -477,7 +473,7 @@
           <a:p>
             <a:fld id="{D4416F66-9758-4FBC-B24D-658CEEE1F2E2}" type="datetimeFigureOut">
               <a:rPr lang="zh-TW" altLang="en-US" smtClean="0"/>
-              <a:t>2023/11/11</a:t>
+              <a:t>2024/5/25</a:t>
             </a:fld>
             <a:endParaRPr lang="zh-TW" altLang="en-US"/>
           </a:p>
@@ -571,10 +567,9 @@
           <a:lstStyle/>
           <a:p>
             <a:r>
-              <a:rPr lang="zh-TW" altLang="en-US" smtClean="0"/>
+              <a:rPr lang="zh-TW" altLang="en-US"/>
               <a:t>按一下以編輯母片標題樣式</a:t>
             </a:r>
-            <a:endParaRPr lang="zh-TW" altLang="en-US"/>
           </a:p>
         </p:txBody>
       </p:sp>
@@ -600,38 +595,37 @@
           <a:p>
             <a:pPr lvl="0"/>
             <a:r>
-              <a:rPr lang="zh-TW" altLang="en-US" smtClean="0"/>
+              <a:rPr lang="zh-TW" altLang="en-US"/>
               <a:t>按一下以編輯母片文字樣式</a:t>
             </a:r>
           </a:p>
           <a:p>
             <a:pPr lvl="1"/>
             <a:r>
-              <a:rPr lang="zh-TW" altLang="en-US" smtClean="0"/>
+              <a:rPr lang="zh-TW" altLang="en-US"/>
               <a:t>第二層</a:t>
             </a:r>
           </a:p>
           <a:p>
             <a:pPr lvl="2"/>
             <a:r>
-              <a:rPr lang="zh-TW" altLang="en-US" smtClean="0"/>
+              <a:rPr lang="zh-TW" altLang="en-US"/>
               <a:t>第三層</a:t>
             </a:r>
           </a:p>
           <a:p>
             <a:pPr lvl="3"/>
             <a:r>
-              <a:rPr lang="zh-TW" altLang="en-US" smtClean="0"/>
+              <a:rPr lang="zh-TW" altLang="en-US"/>
               <a:t>第四層</a:t>
             </a:r>
           </a:p>
           <a:p>
             <a:pPr lvl="4"/>
             <a:r>
-              <a:rPr lang="zh-TW" altLang="en-US" smtClean="0"/>
+              <a:rPr lang="zh-TW" altLang="en-US"/>
               <a:t>第五層</a:t>
             </a:r>
-            <a:endParaRPr lang="zh-TW" altLang="en-US"/>
           </a:p>
         </p:txBody>
       </p:sp>
@@ -652,7 +646,7 @@
           <a:p>
             <a:fld id="{D4416F66-9758-4FBC-B24D-658CEEE1F2E2}" type="datetimeFigureOut">
               <a:rPr lang="zh-TW" altLang="en-US" smtClean="0"/>
-              <a:t>2023/11/11</a:t>
+              <a:t>2024/5/25</a:t>
             </a:fld>
             <a:endParaRPr lang="zh-TW" altLang="en-US"/>
           </a:p>
@@ -741,10 +735,9 @@
           <a:lstStyle/>
           <a:p>
             <a:r>
-              <a:rPr lang="zh-TW" altLang="en-US" smtClean="0"/>
+              <a:rPr lang="zh-TW" altLang="en-US"/>
               <a:t>按一下以編輯母片標題樣式</a:t>
             </a:r>
-            <a:endParaRPr lang="zh-TW" altLang="en-US"/>
           </a:p>
         </p:txBody>
       </p:sp>
@@ -765,38 +758,37 @@
           <a:p>
             <a:pPr lvl="0"/>
             <a:r>
-              <a:rPr lang="zh-TW" altLang="en-US" smtClean="0"/>
+              <a:rPr lang="zh-TW" altLang="en-US"/>
               <a:t>按一下以編輯母片文字樣式</a:t>
             </a:r>
           </a:p>
           <a:p>
             <a:pPr lvl="1"/>
             <a:r>
-              <a:rPr lang="zh-TW" altLang="en-US" smtClean="0"/>
+              <a:rPr lang="zh-TW" altLang="en-US"/>
               <a:t>第二層</a:t>
             </a:r>
           </a:p>
           <a:p>
             <a:pPr lvl="2"/>
             <a:r>
-              <a:rPr lang="zh-TW" altLang="en-US" smtClean="0"/>
+              <a:rPr lang="zh-TW" altLang="en-US"/>
               <a:t>第三層</a:t>
             </a:r>
           </a:p>
           <a:p>
             <a:pPr lvl="3"/>
             <a:r>
-              <a:rPr lang="zh-TW" altLang="en-US" smtClean="0"/>
+              <a:rPr lang="zh-TW" altLang="en-US"/>
               <a:t>第四層</a:t>
             </a:r>
           </a:p>
           <a:p>
             <a:pPr lvl="4"/>
             <a:r>
-              <a:rPr lang="zh-TW" altLang="en-US" smtClean="0"/>
+              <a:rPr lang="zh-TW" altLang="en-US"/>
               <a:t>第五層</a:t>
             </a:r>
-            <a:endParaRPr lang="zh-TW" altLang="en-US"/>
           </a:p>
         </p:txBody>
       </p:sp>
@@ -817,7 +809,7 @@
           <a:p>
             <a:fld id="{D4416F66-9758-4FBC-B24D-658CEEE1F2E2}" type="datetimeFigureOut">
               <a:rPr lang="zh-TW" altLang="en-US" smtClean="0"/>
-              <a:t>2023/11/11</a:t>
+              <a:t>2024/5/25</a:t>
             </a:fld>
             <a:endParaRPr lang="zh-TW" altLang="en-US"/>
           </a:p>
@@ -915,10 +907,9 @@
           </a:lstStyle>
           <a:p>
             <a:r>
-              <a:rPr lang="zh-TW" altLang="en-US" smtClean="0"/>
+              <a:rPr lang="zh-TW" altLang="en-US"/>
               <a:t>按一下以編輯母片標題樣式</a:t>
             </a:r>
-            <a:endParaRPr lang="zh-TW" altLang="en-US"/>
           </a:p>
         </p:txBody>
       </p:sp>
@@ -1035,7 +1026,7 @@
           <a:p>
             <a:pPr lvl="0"/>
             <a:r>
-              <a:rPr lang="zh-TW" altLang="en-US" smtClean="0"/>
+              <a:rPr lang="zh-TW" altLang="en-US"/>
               <a:t>按一下以編輯母片文字樣式</a:t>
             </a:r>
           </a:p>
@@ -1058,7 +1049,7 @@
           <a:p>
             <a:fld id="{D4416F66-9758-4FBC-B24D-658CEEE1F2E2}" type="datetimeFigureOut">
               <a:rPr lang="zh-TW" altLang="en-US" smtClean="0"/>
-              <a:t>2023/11/11</a:t>
+              <a:t>2024/5/25</a:t>
             </a:fld>
             <a:endParaRPr lang="zh-TW" altLang="en-US"/>
           </a:p>
@@ -1147,10 +1138,9 @@
           <a:lstStyle/>
           <a:p>
             <a:r>
-              <a:rPr lang="zh-TW" altLang="en-US" smtClean="0"/>
+              <a:rPr lang="zh-TW" altLang="en-US"/>
               <a:t>按一下以編輯母片標題樣式</a:t>
             </a:r>
-            <a:endParaRPr lang="zh-TW" altLang="en-US"/>
           </a:p>
         </p:txBody>
       </p:sp>
@@ -1204,38 +1194,37 @@
           <a:p>
             <a:pPr lvl="0"/>
             <a:r>
-              <a:rPr lang="zh-TW" altLang="en-US" smtClean="0"/>
+              <a:rPr lang="zh-TW" altLang="en-US"/>
               <a:t>按一下以編輯母片文字樣式</a:t>
             </a:r>
           </a:p>
           <a:p>
             <a:pPr lvl="1"/>
             <a:r>
-              <a:rPr lang="zh-TW" altLang="en-US" smtClean="0"/>
+              <a:rPr lang="zh-TW" altLang="en-US"/>
               <a:t>第二層</a:t>
             </a:r>
           </a:p>
           <a:p>
             <a:pPr lvl="2"/>
             <a:r>
-              <a:rPr lang="zh-TW" altLang="en-US" smtClean="0"/>
+              <a:rPr lang="zh-TW" altLang="en-US"/>
               <a:t>第三層</a:t>
             </a:r>
           </a:p>
           <a:p>
             <a:pPr lvl="3"/>
             <a:r>
-              <a:rPr lang="zh-TW" altLang="en-US" smtClean="0"/>
+              <a:rPr lang="zh-TW" altLang="en-US"/>
               <a:t>第四層</a:t>
             </a:r>
           </a:p>
           <a:p>
             <a:pPr lvl="4"/>
             <a:r>
-              <a:rPr lang="zh-TW" altLang="en-US" smtClean="0"/>
+              <a:rPr lang="zh-TW" altLang="en-US"/>
               <a:t>第五層</a:t>
             </a:r>
-            <a:endParaRPr lang="zh-TW" altLang="en-US"/>
           </a:p>
         </p:txBody>
       </p:sp>
@@ -1289,38 +1278,37 @@
           <a:p>
             <a:pPr lvl="0"/>
             <a:r>
-              <a:rPr lang="zh-TW" altLang="en-US" smtClean="0"/>
+              <a:rPr lang="zh-TW" altLang="en-US"/>
               <a:t>按一下以編輯母片文字樣式</a:t>
             </a:r>
           </a:p>
           <a:p>
             <a:pPr lvl="1"/>
             <a:r>
-              <a:rPr lang="zh-TW" altLang="en-US" smtClean="0"/>
+              <a:rPr lang="zh-TW" altLang="en-US"/>
               <a:t>第二層</a:t>
             </a:r>
           </a:p>
           <a:p>
             <a:pPr lvl="2"/>
             <a:r>
-              <a:rPr lang="zh-TW" altLang="en-US" smtClean="0"/>
+              <a:rPr lang="zh-TW" altLang="en-US"/>
               <a:t>第三層</a:t>
             </a:r>
           </a:p>
           <a:p>
             <a:pPr lvl="3"/>
             <a:r>
-              <a:rPr lang="zh-TW" altLang="en-US" smtClean="0"/>
+              <a:rPr lang="zh-TW" altLang="en-US"/>
               <a:t>第四層</a:t>
             </a:r>
           </a:p>
           <a:p>
             <a:pPr lvl="4"/>
             <a:r>
-              <a:rPr lang="zh-TW" altLang="en-US" smtClean="0"/>
+              <a:rPr lang="zh-TW" altLang="en-US"/>
               <a:t>第五層</a:t>
             </a:r>
-            <a:endParaRPr lang="zh-TW" altLang="en-US"/>
           </a:p>
         </p:txBody>
       </p:sp>
@@ -1341,7 +1329,7 @@
           <a:p>
             <a:fld id="{D4416F66-9758-4FBC-B24D-658CEEE1F2E2}" type="datetimeFigureOut">
               <a:rPr lang="zh-TW" altLang="en-US" smtClean="0"/>
-              <a:t>2023/11/11</a:t>
+              <a:t>2024/5/25</a:t>
             </a:fld>
             <a:endParaRPr lang="zh-TW" altLang="en-US"/>
           </a:p>
@@ -1434,10 +1422,9 @@
           </a:lstStyle>
           <a:p>
             <a:r>
-              <a:rPr lang="zh-TW" altLang="en-US" smtClean="0"/>
+              <a:rPr lang="zh-TW" altLang="en-US"/>
               <a:t>按一下以編輯母片標題樣式</a:t>
             </a:r>
-            <a:endParaRPr lang="zh-TW" altLang="en-US"/>
           </a:p>
         </p:txBody>
       </p:sp>
@@ -1500,7 +1487,7 @@
           <a:p>
             <a:pPr lvl="0"/>
             <a:r>
-              <a:rPr lang="zh-TW" altLang="en-US" smtClean="0"/>
+              <a:rPr lang="zh-TW" altLang="en-US"/>
               <a:t>按一下以編輯母片文字樣式</a:t>
             </a:r>
           </a:p>
@@ -1556,38 +1543,37 @@
           <a:p>
             <a:pPr lvl="0"/>
             <a:r>
-              <a:rPr lang="zh-TW" altLang="en-US" smtClean="0"/>
+              <a:rPr lang="zh-TW" altLang="en-US"/>
               <a:t>按一下以編輯母片文字樣式</a:t>
             </a:r>
           </a:p>
           <a:p>
             <a:pPr lvl="1"/>
             <a:r>
-              <a:rPr lang="zh-TW" altLang="en-US" smtClean="0"/>
+              <a:rPr lang="zh-TW" altLang="en-US"/>
               <a:t>第二層</a:t>
             </a:r>
           </a:p>
           <a:p>
             <a:pPr lvl="2"/>
             <a:r>
-              <a:rPr lang="zh-TW" altLang="en-US" smtClean="0"/>
+              <a:rPr lang="zh-TW" altLang="en-US"/>
               <a:t>第三層</a:t>
             </a:r>
           </a:p>
           <a:p>
             <a:pPr lvl="3"/>
             <a:r>
-              <a:rPr lang="zh-TW" altLang="en-US" smtClean="0"/>
+              <a:rPr lang="zh-TW" altLang="en-US"/>
               <a:t>第四層</a:t>
             </a:r>
           </a:p>
           <a:p>
             <a:pPr lvl="4"/>
             <a:r>
-              <a:rPr lang="zh-TW" altLang="en-US" smtClean="0"/>
+              <a:rPr lang="zh-TW" altLang="en-US"/>
               <a:t>第五層</a:t>
             </a:r>
-            <a:endParaRPr lang="zh-TW" altLang="en-US"/>
           </a:p>
         </p:txBody>
       </p:sp>
@@ -1650,7 +1636,7 @@
           <a:p>
             <a:pPr lvl="0"/>
             <a:r>
-              <a:rPr lang="zh-TW" altLang="en-US" smtClean="0"/>
+              <a:rPr lang="zh-TW" altLang="en-US"/>
               <a:t>按一下以編輯母片文字樣式</a:t>
             </a:r>
           </a:p>
@@ -1706,38 +1692,37 @@
           <a:p>
             <a:pPr lvl="0"/>
             <a:r>
-              <a:rPr lang="zh-TW" altLang="en-US" smtClean="0"/>
+              <a:rPr lang="zh-TW" altLang="en-US"/>
               <a:t>按一下以編輯母片文字樣式</a:t>
             </a:r>
           </a:p>
           <a:p>
             <a:pPr lvl="1"/>
             <a:r>
-              <a:rPr lang="zh-TW" altLang="en-US" smtClean="0"/>
+              <a:rPr lang="zh-TW" altLang="en-US"/>
               <a:t>第二層</a:t>
             </a:r>
           </a:p>
           <a:p>
             <a:pPr lvl="2"/>
             <a:r>
-              <a:rPr lang="zh-TW" altLang="en-US" smtClean="0"/>
+              <a:rPr lang="zh-TW" altLang="en-US"/>
               <a:t>第三層</a:t>
             </a:r>
           </a:p>
           <a:p>
             <a:pPr lvl="3"/>
             <a:r>
-              <a:rPr lang="zh-TW" altLang="en-US" smtClean="0"/>
+              <a:rPr lang="zh-TW" altLang="en-US"/>
               <a:t>第四層</a:t>
             </a:r>
           </a:p>
           <a:p>
             <a:pPr lvl="4"/>
             <a:r>
-              <a:rPr lang="zh-TW" altLang="en-US" smtClean="0"/>
+              <a:rPr lang="zh-TW" altLang="en-US"/>
               <a:t>第五層</a:t>
             </a:r>
-            <a:endParaRPr lang="zh-TW" altLang="en-US"/>
           </a:p>
         </p:txBody>
       </p:sp>
@@ -1758,7 +1743,7 @@
           <a:p>
             <a:fld id="{D4416F66-9758-4FBC-B24D-658CEEE1F2E2}" type="datetimeFigureOut">
               <a:rPr lang="zh-TW" altLang="en-US" smtClean="0"/>
-              <a:t>2023/11/11</a:t>
+              <a:t>2024/5/25</a:t>
             </a:fld>
             <a:endParaRPr lang="zh-TW" altLang="en-US"/>
           </a:p>
@@ -1847,10 +1832,9 @@
           <a:lstStyle/>
           <a:p>
             <a:r>
-              <a:rPr lang="zh-TW" altLang="en-US" smtClean="0"/>
+              <a:rPr lang="zh-TW" altLang="en-US"/>
               <a:t>按一下以編輯母片標題樣式</a:t>
             </a:r>
-            <a:endParaRPr lang="zh-TW" altLang="en-US"/>
           </a:p>
         </p:txBody>
       </p:sp>
@@ -1871,7 +1855,7 @@
           <a:p>
             <a:fld id="{D4416F66-9758-4FBC-B24D-658CEEE1F2E2}" type="datetimeFigureOut">
               <a:rPr lang="zh-TW" altLang="en-US" smtClean="0"/>
-              <a:t>2023/11/11</a:t>
+              <a:t>2024/5/25</a:t>
             </a:fld>
             <a:endParaRPr lang="zh-TW" altLang="en-US"/>
           </a:p>
@@ -1961,7 +1945,7 @@
           <a:p>
             <a:fld id="{D4416F66-9758-4FBC-B24D-658CEEE1F2E2}" type="datetimeFigureOut">
               <a:rPr lang="zh-TW" altLang="en-US" smtClean="0"/>
-              <a:t>2023/11/11</a:t>
+              <a:t>2024/5/25</a:t>
             </a:fld>
             <a:endParaRPr lang="zh-TW" altLang="en-US"/>
           </a:p>
@@ -2059,10 +2043,9 @@
           </a:lstStyle>
           <a:p>
             <a:r>
-              <a:rPr lang="zh-TW" altLang="en-US" smtClean="0"/>
+              <a:rPr lang="zh-TW" altLang="en-US"/>
               <a:t>按一下以編輯母片標題樣式</a:t>
             </a:r>
-            <a:endParaRPr lang="zh-TW" altLang="en-US"/>
           </a:p>
         </p:txBody>
       </p:sp>
@@ -2116,38 +2099,37 @@
           <a:p>
             <a:pPr lvl="0"/>
             <a:r>
-              <a:rPr lang="zh-TW" altLang="en-US" smtClean="0"/>
+              <a:rPr lang="zh-TW" altLang="en-US"/>
               <a:t>按一下以編輯母片文字樣式</a:t>
             </a:r>
           </a:p>
           <a:p>
             <a:pPr lvl="1"/>
             <a:r>
-              <a:rPr lang="zh-TW" altLang="en-US" smtClean="0"/>
+              <a:rPr lang="zh-TW" altLang="en-US"/>
               <a:t>第二層</a:t>
             </a:r>
           </a:p>
           <a:p>
             <a:pPr lvl="2"/>
             <a:r>
-              <a:rPr lang="zh-TW" altLang="en-US" smtClean="0"/>
+              <a:rPr lang="zh-TW" altLang="en-US"/>
               <a:t>第三層</a:t>
             </a:r>
           </a:p>
           <a:p>
             <a:pPr lvl="3"/>
             <a:r>
-              <a:rPr lang="zh-TW" altLang="en-US" smtClean="0"/>
+              <a:rPr lang="zh-TW" altLang="en-US"/>
               <a:t>第四層</a:t>
             </a:r>
           </a:p>
           <a:p>
             <a:pPr lvl="4"/>
             <a:r>
-              <a:rPr lang="zh-TW" altLang="en-US" smtClean="0"/>
+              <a:rPr lang="zh-TW" altLang="en-US"/>
               <a:t>第五層</a:t>
             </a:r>
-            <a:endParaRPr lang="zh-TW" altLang="en-US"/>
           </a:p>
         </p:txBody>
       </p:sp>
@@ -2210,7 +2192,7 @@
           <a:p>
             <a:pPr lvl="0"/>
             <a:r>
-              <a:rPr lang="zh-TW" altLang="en-US" smtClean="0"/>
+              <a:rPr lang="zh-TW" altLang="en-US"/>
               <a:t>按一下以編輯母片文字樣式</a:t>
             </a:r>
           </a:p>
@@ -2233,7 +2215,7 @@
           <a:p>
             <a:fld id="{D4416F66-9758-4FBC-B24D-658CEEE1F2E2}" type="datetimeFigureOut">
               <a:rPr lang="zh-TW" altLang="en-US" smtClean="0"/>
-              <a:t>2023/11/11</a:t>
+              <a:t>2024/5/25</a:t>
             </a:fld>
             <a:endParaRPr lang="zh-TW" altLang="en-US"/>
           </a:p>
@@ -2331,10 +2313,9 @@
           </a:lstStyle>
           <a:p>
             <a:r>
-              <a:rPr lang="zh-TW" altLang="en-US" smtClean="0"/>
+              <a:rPr lang="zh-TW" altLang="en-US"/>
               <a:t>按一下以編輯母片標題樣式</a:t>
             </a:r>
-            <a:endParaRPr lang="zh-TW" altLang="en-US"/>
           </a:p>
         </p:txBody>
       </p:sp>
@@ -2396,10 +2377,9 @@
           </a:lstStyle>
           <a:p>
             <a:r>
-              <a:rPr lang="zh-TW" altLang="en-US" smtClean="0"/>
+              <a:rPr lang="zh-TW" altLang="en-US"/>
               <a:t>按一下圖示以新增圖片</a:t>
             </a:r>
-            <a:endParaRPr lang="zh-TW" altLang="en-US"/>
           </a:p>
         </p:txBody>
       </p:sp>
@@ -2462,7 +2442,7 @@
           <a:p>
             <a:pPr lvl="0"/>
             <a:r>
-              <a:rPr lang="zh-TW" altLang="en-US" smtClean="0"/>
+              <a:rPr lang="zh-TW" altLang="en-US"/>
               <a:t>按一下以編輯母片文字樣式</a:t>
             </a:r>
           </a:p>
@@ -2485,7 +2465,7 @@
           <a:p>
             <a:fld id="{D4416F66-9758-4FBC-B24D-658CEEE1F2E2}" type="datetimeFigureOut">
               <a:rPr lang="zh-TW" altLang="en-US" smtClean="0"/>
-              <a:t>2023/11/11</a:t>
+              <a:t>2024/5/25</a:t>
             </a:fld>
             <a:endParaRPr lang="zh-TW" altLang="en-US"/>
           </a:p>
@@ -2594,10 +2574,9 @@
           <a:lstStyle/>
           <a:p>
             <a:r>
-              <a:rPr lang="zh-TW" altLang="en-US" smtClean="0"/>
+              <a:rPr lang="zh-TW" altLang="en-US"/>
               <a:t>按一下以編輯母片標題樣式</a:t>
             </a:r>
-            <a:endParaRPr lang="zh-TW" altLang="en-US"/>
           </a:p>
         </p:txBody>
       </p:sp>
@@ -2628,38 +2607,37 @@
           <a:p>
             <a:pPr lvl="0"/>
             <a:r>
-              <a:rPr lang="zh-TW" altLang="en-US" smtClean="0"/>
+              <a:rPr lang="zh-TW" altLang="en-US"/>
               <a:t>按一下以編輯母片文字樣式</a:t>
             </a:r>
           </a:p>
           <a:p>
             <a:pPr lvl="1"/>
             <a:r>
-              <a:rPr lang="zh-TW" altLang="en-US" smtClean="0"/>
+              <a:rPr lang="zh-TW" altLang="en-US"/>
               <a:t>第二層</a:t>
             </a:r>
           </a:p>
           <a:p>
             <a:pPr lvl="2"/>
             <a:r>
-              <a:rPr lang="zh-TW" altLang="en-US" smtClean="0"/>
+              <a:rPr lang="zh-TW" altLang="en-US"/>
               <a:t>第三層</a:t>
             </a:r>
           </a:p>
           <a:p>
             <a:pPr lvl="3"/>
             <a:r>
-              <a:rPr lang="zh-TW" altLang="en-US" smtClean="0"/>
+              <a:rPr lang="zh-TW" altLang="en-US"/>
               <a:t>第四層</a:t>
             </a:r>
           </a:p>
           <a:p>
             <a:pPr lvl="4"/>
             <a:r>
-              <a:rPr lang="zh-TW" altLang="en-US" smtClean="0"/>
+              <a:rPr lang="zh-TW" altLang="en-US"/>
               <a:t>第五層</a:t>
             </a:r>
-            <a:endParaRPr lang="zh-TW" altLang="en-US"/>
           </a:p>
         </p:txBody>
       </p:sp>
@@ -2698,7 +2676,7 @@
           <a:p>
             <a:fld id="{D4416F66-9758-4FBC-B24D-658CEEE1F2E2}" type="datetimeFigureOut">
               <a:rPr lang="zh-TW" altLang="en-US" smtClean="0"/>
-              <a:t>2023/11/11</a:t>
+              <a:t>2024/5/25</a:t>
             </a:fld>
             <a:endParaRPr lang="zh-TW" altLang="en-US"/>
           </a:p>
@@ -3262,7 +3240,7 @@
                 <a:latin typeface="Microsoft JhengHei" panose="020B0604030504040204" pitchFamily="34" charset="-120"/>
                 <a:ea typeface="Microsoft JhengHei" panose="020B0604030504040204" pitchFamily="34" charset="-120"/>
               </a:rPr>
-              <a:t>正</a:t>
+              <a:t>正歌</a:t>
             </a:r>
             <a:r>
               <a:rPr lang="en-US" sz="3733" b="1" dirty="0">
@@ -3339,7 +3317,7 @@
               <a:buNone/>
             </a:pPr>
             <a:r>
-              <a:rPr lang="zh-TW" altLang="en-US" sz="6400" b="1" dirty="0" smtClean="0">
+              <a:rPr lang="zh-TW" altLang="en-US" sz="6400" b="1" dirty="0">
                 <a:solidFill>
                   <a:srgbClr val="660033"/>
                 </a:solidFill>
@@ -3349,7 +3327,7 @@
               <a:t>主</a:t>
             </a:r>
             <a:r>
-              <a:rPr lang="zh-CN" altLang="en-US" sz="6400" b="1" dirty="0" smtClean="0">
+              <a:rPr lang="zh-CN" altLang="en-US" sz="6400" b="1" dirty="0">
                 <a:solidFill>
                   <a:srgbClr val="660033"/>
                 </a:solidFill>
@@ -3359,24 +3337,14 @@
               <a:t>祢</a:t>
             </a:r>
             <a:r>
-              <a:rPr lang="zh-TW" altLang="en-US" sz="6400" b="1" dirty="0" smtClean="0">
+              <a:rPr lang="zh-TW" altLang="en-US" sz="6400" b="1" dirty="0">
                 <a:solidFill>
                   <a:srgbClr val="660033"/>
                 </a:solidFill>
                 <a:latin typeface="微軟正黑體" pitchFamily="34" charset="-120"/>
                 <a:ea typeface="微軟正黑體" pitchFamily="34" charset="-120"/>
               </a:rPr>
-              <a:t>戰</a:t>
-            </a:r>
-            <a:r>
-              <a:rPr lang="zh-TW" altLang="en-US" sz="6400" b="1" dirty="0">
-                <a:solidFill>
-                  <a:srgbClr val="660033"/>
-                </a:solidFill>
-                <a:latin typeface="微軟正黑體" pitchFamily="34" charset="-120"/>
-                <a:ea typeface="微軟正黑體" pitchFamily="34" charset="-120"/>
-              </a:rPr>
-              <a:t>勝黑暗權勢</a:t>
+              <a:t>戰勝黑暗權勢</a:t>
             </a:r>
           </a:p>
         </p:txBody>
@@ -3422,7 +3390,7 @@
                 <a:latin typeface="Microsoft JhengHei" panose="020B0604030504040204" pitchFamily="34" charset="-120"/>
                 <a:ea typeface="Microsoft JhengHei" panose="020B0604030504040204" pitchFamily="34" charset="-120"/>
               </a:rPr>
-              <a:t>正</a:t>
+              <a:t>正歌</a:t>
             </a:r>
             <a:r>
               <a:rPr lang="en-US" sz="3733" b="1" dirty="0">
@@ -3581,7 +3549,7 @@
                 <a:latin typeface="Microsoft JhengHei" panose="020B0604030504040204" pitchFamily="34" charset="-120"/>
                 <a:ea typeface="Microsoft JhengHei" panose="020B0604030504040204" pitchFamily="34" charset="-120"/>
               </a:rPr>
-              <a:t>正</a:t>
+              <a:t>正歌</a:t>
             </a:r>
             <a:r>
               <a:rPr lang="en-US" sz="3733" b="1" dirty="0">
@@ -3658,7 +3626,7 @@
               <a:buNone/>
             </a:pPr>
             <a:r>
-              <a:rPr lang="zh-TW" altLang="en-US" sz="6400" b="1" dirty="0" smtClean="0">
+              <a:rPr lang="zh-TW" altLang="en-US" sz="6400" b="1" dirty="0">
                 <a:solidFill>
                   <a:srgbClr val="660033"/>
                 </a:solidFill>
@@ -3668,7 +3636,7 @@
               <a:t>主</a:t>
             </a:r>
             <a:r>
-              <a:rPr lang="zh-CN" altLang="en-US" sz="6400" b="1" dirty="0" smtClean="0">
+              <a:rPr lang="zh-CN" altLang="en-US" sz="6400" b="1" dirty="0">
                 <a:solidFill>
                   <a:srgbClr val="660033"/>
                 </a:solidFill>
@@ -3678,54 +3646,34 @@
               <a:t>祢</a:t>
             </a:r>
             <a:r>
-              <a:rPr lang="zh-TW" altLang="en-US" sz="6400" b="1" dirty="0" smtClean="0">
+              <a:rPr lang="zh-TW" altLang="en-US" sz="6400" b="1" dirty="0">
                 <a:solidFill>
                   <a:srgbClr val="660033"/>
                 </a:solidFill>
                 <a:latin typeface="微軟正黑體" pitchFamily="34" charset="-120"/>
                 <a:ea typeface="微軟正黑體" pitchFamily="34" charset="-120"/>
               </a:rPr>
-              <a:t>得</a:t>
-            </a:r>
-            <a:r>
-              <a:rPr lang="zh-TW" altLang="en-US" sz="6400" b="1" dirty="0">
+              <a:t>得勝  </a:t>
+            </a:r>
+            <a:r>
+              <a:rPr lang="zh-CN" altLang="en-US" sz="6400" b="1" dirty="0">
                 <a:solidFill>
                   <a:srgbClr val="660033"/>
                 </a:solidFill>
                 <a:latin typeface="微軟正黑體" pitchFamily="34" charset="-120"/>
                 <a:ea typeface="微軟正黑體" pitchFamily="34" charset="-120"/>
               </a:rPr>
-              <a:t>勝  </a:t>
-            </a:r>
-            <a:r>
-              <a:rPr lang="zh-CN" altLang="en-US" sz="6400" b="1" dirty="0" smtClean="0">
+              <a:t>祢</a:t>
+            </a:r>
+            <a:r>
+              <a:rPr lang="zh-TW" altLang="en-US" sz="6400" b="1" dirty="0">
                 <a:solidFill>
                   <a:srgbClr val="660033"/>
                 </a:solidFill>
                 <a:latin typeface="微軟正黑體" pitchFamily="34" charset="-120"/>
                 <a:ea typeface="微軟正黑體" pitchFamily="34" charset="-120"/>
               </a:rPr>
-              <a:t>祢</a:t>
-            </a:r>
-            <a:r>
-              <a:rPr lang="zh-TW" altLang="en-US" sz="6400" b="1" dirty="0" smtClean="0">
-                <a:solidFill>
-                  <a:srgbClr val="660033"/>
-                </a:solidFill>
-                <a:latin typeface="微軟正黑體" pitchFamily="34" charset="-120"/>
-                <a:ea typeface="微軟正黑體" pitchFamily="34" charset="-120"/>
-              </a:rPr>
-              <a:t>已</a:t>
-            </a:r>
-            <a:r>
-              <a:rPr lang="zh-TW" altLang="en-US" sz="6400" b="1" dirty="0">
-                <a:solidFill>
-                  <a:srgbClr val="660033"/>
-                </a:solidFill>
-                <a:latin typeface="微軟正黑體" pitchFamily="34" charset="-120"/>
-                <a:ea typeface="微軟正黑體" pitchFamily="34" charset="-120"/>
-              </a:rPr>
-              <a:t>復活</a:t>
+              <a:t>已復活</a:t>
             </a:r>
           </a:p>
         </p:txBody>
@@ -3771,7 +3719,7 @@
                 <a:latin typeface="Microsoft JhengHei" panose="020B0604030504040204" pitchFamily="34" charset="-120"/>
                 <a:ea typeface="Microsoft JhengHei" panose="020B0604030504040204" pitchFamily="34" charset="-120"/>
               </a:rPr>
-              <a:t>正</a:t>
+              <a:t>正歌</a:t>
             </a:r>
             <a:r>
               <a:rPr lang="en-US" sz="3733" b="1" dirty="0">
@@ -3848,7 +3796,7 @@
               <a:buNone/>
             </a:pPr>
             <a:r>
-              <a:rPr lang="zh-CN" altLang="en-US" sz="6400" b="1" dirty="0" smtClean="0">
+              <a:rPr lang="zh-CN" altLang="en-US" sz="6400" b="1" dirty="0">
                 <a:solidFill>
                   <a:srgbClr val="660033"/>
                 </a:solidFill>
@@ -3858,24 +3806,14 @@
               <a:t>祢</a:t>
             </a:r>
             <a:r>
-              <a:rPr lang="zh-TW" altLang="en-US" sz="6400" b="1" dirty="0" smtClean="0">
+              <a:rPr lang="zh-TW" altLang="en-US" sz="6400" b="1" dirty="0">
                 <a:solidFill>
                   <a:srgbClr val="660033"/>
                 </a:solidFill>
                 <a:latin typeface="微軟正黑體" pitchFamily="34" charset="-120"/>
                 <a:ea typeface="微軟正黑體" pitchFamily="34" charset="-120"/>
               </a:rPr>
-              <a:t>要</a:t>
-            </a:r>
-            <a:r>
-              <a:rPr lang="zh-TW" altLang="en-US" sz="6400" b="1" dirty="0">
-                <a:solidFill>
-                  <a:srgbClr val="660033"/>
-                </a:solidFill>
-                <a:latin typeface="微軟正黑體" pitchFamily="34" charset="-120"/>
-                <a:ea typeface="微軟正黑體" pitchFamily="34" charset="-120"/>
-              </a:rPr>
-              <a:t>震動天地</a:t>
+              <a:t>要震動天地</a:t>
             </a:r>
             <a:endParaRPr lang="en-US" altLang="zh-TW" sz="6400" b="1" dirty="0">
               <a:solidFill>
@@ -3890,7 +3828,7 @@
               <a:buNone/>
             </a:pPr>
             <a:r>
-              <a:rPr lang="zh-CN" altLang="en-US" sz="6400" b="1" dirty="0" smtClean="0">
+              <a:rPr lang="zh-CN" altLang="en-US" sz="6400" b="1" dirty="0">
                 <a:solidFill>
                   <a:srgbClr val="660033"/>
                 </a:solidFill>
@@ -3900,24 +3838,14 @@
               <a:t>祢</a:t>
             </a:r>
             <a:r>
-              <a:rPr lang="zh-TW" altLang="en-US" sz="6400" b="1" dirty="0" smtClean="0">
+              <a:rPr lang="zh-TW" altLang="en-US" sz="6400" b="1" dirty="0">
                 <a:solidFill>
                   <a:srgbClr val="660033"/>
                 </a:solidFill>
                 <a:latin typeface="微軟正黑體" pitchFamily="34" charset="-120"/>
                 <a:ea typeface="微軟正黑體" pitchFamily="34" charset="-120"/>
               </a:rPr>
-              <a:t>必</a:t>
-            </a:r>
-            <a:r>
-              <a:rPr lang="zh-TW" altLang="en-US" sz="6400" b="1" dirty="0">
-                <a:solidFill>
-                  <a:srgbClr val="660033"/>
-                </a:solidFill>
-                <a:latin typeface="微軟正黑體" pitchFamily="34" charset="-120"/>
-                <a:ea typeface="微軟正黑體" pitchFamily="34" charset="-120"/>
-              </a:rPr>
-              <a:t>震動滄海旱地</a:t>
+              <a:t>必震動滄海旱地</a:t>
             </a:r>
             <a:endParaRPr lang="en-US" altLang="zh-TW" sz="6400" b="1" dirty="0">
               <a:solidFill>
@@ -3970,7 +3898,7 @@
                 <a:latin typeface="Microsoft JhengHei" panose="020B0604030504040204" pitchFamily="34" charset="-120"/>
                 <a:ea typeface="Microsoft JhengHei" panose="020B0604030504040204" pitchFamily="34" charset="-120"/>
               </a:rPr>
-              <a:t>副</a:t>
+              <a:t>副歌</a:t>
             </a:r>
             <a:r>
               <a:rPr lang="en-US" sz="3733" b="1" dirty="0">
@@ -4054,20 +3982,10 @@
                 <a:latin typeface="微軟正黑體" pitchFamily="34" charset="-120"/>
                 <a:ea typeface="微軟正黑體" pitchFamily="34" charset="-120"/>
               </a:rPr>
-              <a:t>因萬國萬邦全都屬</a:t>
-            </a:r>
-            <a:r>
-              <a:rPr lang="zh-TW" altLang="en-US" sz="6400" b="1" dirty="0" smtClean="0">
-                <a:solidFill>
-                  <a:srgbClr val="660033"/>
-                </a:solidFill>
-                <a:latin typeface="微軟正黑體" pitchFamily="34" charset="-120"/>
-                <a:ea typeface="微軟正黑體" pitchFamily="34" charset="-120"/>
-              </a:rPr>
-              <a:t>於</a:t>
-            </a:r>
-            <a:r>
-              <a:rPr lang="zh-CN" altLang="en-US" sz="6400" b="1" dirty="0" smtClean="0">
+              <a:t>因萬國萬邦全都屬於</a:t>
+            </a:r>
+            <a:r>
+              <a:rPr lang="zh-CN" altLang="en-US" sz="6400" b="1" dirty="0">
                 <a:solidFill>
                   <a:srgbClr val="660033"/>
                 </a:solidFill>
@@ -4127,7 +4045,7 @@
                 <a:latin typeface="Microsoft JhengHei" panose="020B0604030504040204" pitchFamily="34" charset="-120"/>
                 <a:ea typeface="Microsoft JhengHei" panose="020B0604030504040204" pitchFamily="34" charset="-120"/>
               </a:rPr>
-              <a:t>副</a:t>
+              <a:t>副歌</a:t>
             </a:r>
             <a:r>
               <a:rPr lang="en-US" sz="3733" b="1" dirty="0">
@@ -4204,7 +4122,7 @@
               <a:buNone/>
             </a:pPr>
             <a:r>
-              <a:rPr lang="zh-CN" altLang="en-US" sz="6400" b="1" dirty="0" smtClean="0">
+              <a:rPr lang="zh-CN" altLang="en-US" sz="6400" b="1" dirty="0">
                 <a:solidFill>
                   <a:srgbClr val="660033"/>
                 </a:solidFill>
@@ -4214,24 +4132,14 @@
               <a:t>祢</a:t>
             </a:r>
             <a:r>
-              <a:rPr lang="zh-TW" altLang="en-US" sz="6400" b="1" dirty="0" smtClean="0">
+              <a:rPr lang="zh-TW" altLang="en-US" sz="6400" b="1" dirty="0">
                 <a:solidFill>
                   <a:srgbClr val="660033"/>
                 </a:solidFill>
                 <a:latin typeface="微軟正黑體" pitchFamily="34" charset="-120"/>
                 <a:ea typeface="微軟正黑體" pitchFamily="34" charset="-120"/>
               </a:rPr>
-              <a:t>使</a:t>
-            </a:r>
-            <a:r>
-              <a:rPr lang="zh-TW" altLang="en-US" sz="6400" b="1" dirty="0">
-                <a:solidFill>
-                  <a:srgbClr val="660033"/>
-                </a:solidFill>
-                <a:latin typeface="微軟正黑體" pitchFamily="34" charset="-120"/>
-                <a:ea typeface="微軟正黑體" pitchFamily="34" charset="-120"/>
-              </a:rPr>
-              <a:t>聖殿充滿榮耀</a:t>
+              <a:t>使聖殿充滿榮耀</a:t>
             </a:r>
             <a:endParaRPr lang="en-US" altLang="zh-TW" sz="6400" b="1" dirty="0">
               <a:solidFill>
@@ -4306,7 +4214,7 @@
                 <a:latin typeface="Microsoft JhengHei" panose="020B0604030504040204" pitchFamily="34" charset="-120"/>
                 <a:ea typeface="Microsoft JhengHei" panose="020B0604030504040204" pitchFamily="34" charset="-120"/>
               </a:rPr>
-              <a:t>副</a:t>
+              <a:t>副歌</a:t>
             </a:r>
             <a:r>
               <a:rPr lang="en-US" sz="3733" b="1" dirty="0">
@@ -4383,7 +4291,7 @@
               <a:buNone/>
             </a:pPr>
             <a:r>
-              <a:rPr lang="zh-CN" altLang="en-US" sz="6400" b="1" dirty="0" smtClean="0">
+              <a:rPr lang="zh-CN" altLang="en-US" sz="6400" b="1" dirty="0">
                 <a:solidFill>
                   <a:srgbClr val="660033"/>
                 </a:solidFill>
@@ -4393,24 +4301,14 @@
               <a:t>祢</a:t>
             </a:r>
             <a:r>
-              <a:rPr lang="zh-TW" altLang="en-US" sz="6400" b="1" dirty="0" smtClean="0">
+              <a:rPr lang="zh-TW" altLang="en-US" sz="6400" b="1" dirty="0">
                 <a:solidFill>
                   <a:srgbClr val="660033"/>
                 </a:solidFill>
                 <a:latin typeface="微軟正黑體" pitchFamily="34" charset="-120"/>
                 <a:ea typeface="微軟正黑體" pitchFamily="34" charset="-120"/>
               </a:rPr>
-              <a:t>必</a:t>
-            </a:r>
-            <a:r>
-              <a:rPr lang="zh-TW" altLang="en-US" sz="6400" b="1" dirty="0">
-                <a:solidFill>
-                  <a:srgbClr val="660033"/>
-                </a:solidFill>
-                <a:latin typeface="微軟正黑體" pitchFamily="34" charset="-120"/>
-                <a:ea typeface="微軟正黑體" pitchFamily="34" charset="-120"/>
-              </a:rPr>
-              <a:t>賜平安  必賜福這地</a:t>
+              <a:t>必賜平安  必賜福這地</a:t>
             </a:r>
           </a:p>
         </p:txBody>
@@ -4456,10 +4354,10 @@
                 <a:latin typeface="Microsoft JhengHei" panose="020B0604030504040204" pitchFamily="34" charset="-120"/>
                 <a:ea typeface="Microsoft JhengHei" panose="020B0604030504040204" pitchFamily="34" charset="-120"/>
               </a:rPr>
-              <a:t>副</a:t>
-            </a:r>
-            <a:r>
-              <a:rPr lang="en-US" sz="3733" b="1" dirty="0">
+              <a:t>副歌</a:t>
+            </a:r>
+            <a:r>
+              <a:rPr lang="en-US" sz="3733" b="1">
                 <a:solidFill>
                   <a:srgbClr val="660033"/>
                 </a:solidFill>
